--- a/plano-de-aulas/aula-08-slides.pptx
+++ b/plano-de-aulas/aula-08-slides.pptx
@@ -3491,7 +3491,7 @@
           <a:lstStyle/>
           <a:p>
             <a:r>
-              <a:t>Contract testing (PACT)</a:t>
+              <a:t>Resiliência: retry e circuit breaker</a:t>
             </a:r>
           </a:p>
         </p:txBody>
@@ -3512,7 +3512,7 @@
           <a:lstStyle/>
           <a:p>
             <a:r>
-              <a:t>BE-JV-010 · Aula 8 · 08/07 · Arquitetura testável</a:t>
+              <a:t>BE-JV-010 · Aula 7 · 06/07 · Resiliência e retry</a:t>
             </a:r>
           </a:p>
         </p:txBody>
@@ -3572,17 +3572,17 @@
           <a:lstStyle/>
           <a:p>
             <a:r>
-              <a:t>Times diferentes mantêm emissor e gravador.</a:t>
+              <a:t>A notificação depende de um gateway externo que oscila.</a:t>
             </a:r>
           </a:p>
           <a:p>
             <a:r>
-              <a:t>Uma mudança de contrato quebra o outro em produção.</a:t>
+              <a:t>Queremos reentregar sem inundar</a:t>
             </a:r>
           </a:p>
           <a:p>
             <a:r>
-              <a:t>Como travar isso no CI?</a:t>
+              <a:t>e parar de tentar quando claramente está fora.</a:t>
             </a:r>
           </a:p>
         </p:txBody>
@@ -3659,22 +3659,27 @@
           <a:lstStyle/>
           <a:p>
             <a:r>
-              <a:t>Pirâmide de testes; por que E2E não escala</a:t>
+              <a:t>Backoff exponencial + jitter (evitar retry storm)</a:t>
             </a:r>
           </a:p>
           <a:p>
             <a:r>
-              <a:t>Consumer-driven contracts</a:t>
+              <a:t>Idempotência como pré-condição</a:t>
             </a:r>
           </a:p>
           <a:p>
             <a:r>
-              <a:t>PACT: consumidor gera, provedor verifica</a:t>
+              <a:t>Circuit breaker: closed/open/half-open</a:t>
             </a:r>
           </a:p>
           <a:p>
             <a:r>
-              <a:t>can-I-deploy; arquitetura amigável a testes</a:t>
+              <a:t>Timeout e bulkhead</a:t>
+            </a:r>
+          </a:p>
+          <a:p>
+            <a:r>
+              <a:t>@RetryableTopic + DLT</a:t>
             </a:r>
           </a:p>
         </p:txBody>
@@ -3751,12 +3756,12 @@
           <a:lstStyle/>
           <a:p>
             <a:r>
-              <a:t>O 'contrato' que vivia num documento Word / layout de arquivo</a:t>
+              <a:t>'Reprocessamento do batch que deu erro' e limites de retentativa do scheduler</a:t>
             </a:r>
           </a:p>
           <a:p>
             <a:r>
-              <a:t>agora é executável e roda no pipeline</a:t>
+              <a:t>agora reativos e por requisição</a:t>
             </a:r>
           </a:p>
         </p:txBody>
@@ -3833,17 +3838,17 @@
           <a:lstStyle/>
           <a:p>
             <a:r>
-              <a:t>Testar saída não-determinística por schema/propriedade</a:t>
+              <a:t>APIs de LLM são instáveis por natureza (rate limit, timeout, 5xx)</a:t>
             </a:r>
           </a:p>
           <a:p>
             <a:r>
-              <a:t>Evals como contrato de um componente de IA</a:t>
+              <a:t>Fallback de modelo quando o circuito abre</a:t>
             </a:r>
           </a:p>
           <a:p>
             <a:r>
-              <a:t>Structured outputs / JSON schema como contrato</a:t>
+              <a:t>Idempotência com saída não-determinística</a:t>
             </a:r>
           </a:p>
         </p:txBody>
@@ -3920,12 +3925,12 @@
           <a:lstStyle/>
           <a:p>
             <a:r>
-              <a:t>Base: contract test que falha ao mudar o contrato</a:t>
+              <a:t>Base: @RetryableTopic com backoff até a DLT</a:t>
             </a:r>
           </a:p>
           <a:p>
             <a:r>
-              <a:t>Stretch: verificação de schema/propriedade (estilo eval) no mvn verify</a:t>
+              <a:t>Stretch: retry + breaker + idempotência sob falha intermitente E permanente</a:t>
             </a:r>
           </a:p>
         </p:txBody>
@@ -3981,7 +3986,7 @@
           <a:lstStyle/>
           <a:p>
             <a:r>
-              <a:t>Contrato bom é o que falha no seu CI, não na produção do outro time.</a:t>
+              <a:t>Resiliência é decidir como falhar de propósito, antes que o sistema decida por você.</a:t>
             </a:r>
           </a:p>
         </p:txBody>
